--- a/templates/Forming Worlds Poster (slide).pptx
+++ b/templates/Forming Worlds Poster (slide).pptx
@@ -3218,7 +3218,7 @@
         <p:spPr>
           <a:xfrm>
             <a:off x="304803" y="194312"/>
-            <a:ext cx="8412563" cy="1036330"/>
+            <a:ext cx="8717366" cy="643134"/>
           </a:xfrm>
           <a:prstGeom prst="rect">
             <a:avLst/>
@@ -3226,13 +3226,21 @@
           <a:noFill/>
         </p:spPr>
         <p:txBody>
-          <a:bodyPr wrap="square" anchor="t" lIns="0" rIns="0" tIns="0" bIns="0">
+          <a:bodyPr wrap="square" lIns="0" rIns="0" tIns="0" bIns="0">
             <a:spAutoFit/>
           </a:bodyPr>
           <a:lstStyle/>
           <a:p>
-            <a:r>
-              <a:rPr sz="2410">
+            <a:pPr>
+              <a:lnSpc>
+                <a:spcPts val="2590"/>
+              </a:lnSpc>
+              <a:spcBef>
+                <a:spcPts val="0"/>
+              </a:spcBef>
+            </a:pPr>
+            <a:r>
+              <a:rPr sz="2400">
                 <a:solidFill>
                   <a:srgbClr val="FFFFFF"/>
                 </a:solidFill>
@@ -3242,6 +3250,14 @@
             </a:r>
           </a:p>
           <a:p>
+            <a:pPr>
+              <a:lnSpc>
+                <a:spcPts val="1210"/>
+              </a:lnSpc>
+              <a:spcBef>
+                <a:spcPts val="720"/>
+              </a:spcBef>
+            </a:pPr>
             <a:r>
               <a:rPr sz="1060">
                 <a:solidFill>
@@ -3253,8 +3269,16 @@
             </a:r>
           </a:p>
           <a:p>
-            <a:r>
-              <a:rPr sz="869">
+            <a:pPr>
+              <a:lnSpc>
+                <a:spcPts val="990"/>
+              </a:lnSpc>
+              <a:spcBef>
+                <a:spcPts val="240"/>
+              </a:spcBef>
+            </a:pPr>
+            <a:r>
+              <a:rPr sz="860">
                 <a:solidFill>
                   <a:srgbClr val="ABB2B8"/>
                 </a:solidFill>
@@ -3267,20 +3291,106 @@
       </p:sp>
       <p:sp>
         <p:nvSpPr>
-          <p:cNvPr id="6" name="Rectangle 5"/>
+          <p:cNvPr id="6" name="TextBox 5"/>
+          <p:cNvSpPr txBox="1"/>
+          <p:nvPr/>
+        </p:nvSpPr>
+        <p:spPr>
+          <a:xfrm>
+            <a:off x="304803" y="1524015"/>
+            <a:ext cx="304803" cy="381004"/>
+          </a:xfrm>
+          <a:prstGeom prst="rect">
+            <a:avLst/>
+          </a:prstGeom>
+          <a:noFill/>
+        </p:spPr>
+        <p:txBody>
+          <a:bodyPr wrap="square" lIns="0" rIns="0" tIns="0" bIns="0">
+            <a:spAutoFit/>
+          </a:bodyPr>
+          <a:lstStyle/>
+          <a:p>
+            <a:pPr>
+              <a:lnSpc>
+                <a:spcPts val="2850"/>
+              </a:lnSpc>
+              <a:spcBef>
+                <a:spcPts val="0"/>
+              </a:spcBef>
+            </a:pPr>
+            <a:r>
+              <a:rPr sz="2850">
+                <a:solidFill>
+                  <a:srgbClr val="4DAAD8"/>
+                </a:solidFill>
+                <a:latin typeface="Geist Light"/>
+              </a:rPr>
+              <a:t>1</a:t>
+            </a:r>
+          </a:p>
+        </p:txBody>
+      </p:sp>
+      <p:sp>
+        <p:nvSpPr>
+          <p:cNvPr id="7" name="TextBox 6"/>
+          <p:cNvSpPr txBox="1"/>
+          <p:nvPr/>
+        </p:nvSpPr>
+        <p:spPr>
+          <a:xfrm>
+            <a:off x="609606" y="1571640"/>
+            <a:ext cx="3383313" cy="342903"/>
+          </a:xfrm>
+          <a:prstGeom prst="rect">
+            <a:avLst/>
+          </a:prstGeom>
+          <a:noFill/>
+        </p:spPr>
+        <p:txBody>
+          <a:bodyPr wrap="square" lIns="0" rIns="0" tIns="0" bIns="0">
+            <a:spAutoFit/>
+          </a:bodyPr>
+          <a:lstStyle/>
+          <a:p>
+            <a:pPr>
+              <a:lnSpc>
+                <a:spcPts val="1680"/>
+              </a:lnSpc>
+              <a:spcBef>
+                <a:spcPts val="0"/>
+              </a:spcBef>
+            </a:pPr>
+            <a:r>
+              <a:rPr sz="1500">
+                <a:solidFill>
+                  <a:srgbClr val="FFFFFF"/>
+                </a:solidFill>
+                <a:latin typeface="Geist Medium"/>
+              </a:rPr>
+              <a:t>First message as one statement</a:t>
+            </a:r>
+          </a:p>
+        </p:txBody>
+      </p:sp>
+      <p:sp>
+        <p:nvSpPr>
+          <p:cNvPr id="8" name="Rounded Rectangle 7"/>
           <p:cNvSpPr/>
           <p:nvPr/>
         </p:nvSpPr>
         <p:spPr>
           <a:xfrm>
-            <a:off x="4114841" y="1524015"/>
-            <a:ext cx="7620" cy="4800580"/>
-          </a:xfrm>
-          <a:prstGeom prst="rect">
-            <a:avLst/>
+            <a:off x="782304" y="2341268"/>
+            <a:ext cx="2733115" cy="1753917"/>
+          </a:xfrm>
+          <a:prstGeom prst="roundRect">
+            <a:avLst>
+              <a:gd name="adj" fmla="val 3475"/>
+            </a:avLst>
           </a:prstGeom>
           <a:solidFill>
-            <a:srgbClr val="2A343C"/>
+            <a:srgbClr val="FFFFFF"/>
           </a:solidFill>
           <a:ln>
             <a:noFill/>
@@ -3309,16 +3419,40 @@
           </a:p>
         </p:txBody>
       </p:sp>
-      <p:sp>
-        <p:nvSpPr>
-          <p:cNvPr id="7" name="TextBox 6"/>
+      <p:pic>
+        <p:nvPicPr>
+          <p:cNvPr id="9" name="Picture 8" descr="poster-placeholder.png"/>
+          <p:cNvPicPr>
+            <a:picLocks noChangeAspect="1"/>
+          </p:cNvPicPr>
+          <p:nvPr/>
+        </p:nvPicPr>
+        <p:blipFill>
+          <a:blip r:embed="rId3"/>
+          <a:stretch>
+            <a:fillRect/>
+          </a:stretch>
+        </p:blipFill>
+        <p:spPr>
+          <a:xfrm>
+            <a:off x="843264" y="2402229"/>
+            <a:ext cx="2611193" cy="1631996"/>
+          </a:xfrm>
+          <a:prstGeom prst="rect">
+            <a:avLst/>
+          </a:prstGeom>
+        </p:spPr>
+      </p:pic>
+      <p:sp>
+        <p:nvSpPr>
+          <p:cNvPr id="10" name="TextBox 9"/>
           <p:cNvSpPr txBox="1"/>
           <p:nvPr/>
         </p:nvSpPr>
         <p:spPr>
           <a:xfrm>
-            <a:off x="304803" y="1524015"/>
-            <a:ext cx="304803" cy="381004"/>
+            <a:off x="304803" y="4140906"/>
+            <a:ext cx="3688116" cy="161546"/>
           </a:xfrm>
           <a:prstGeom prst="rect">
             <a:avLst/>
@@ -3326,71 +3460,45 @@
           <a:noFill/>
         </p:spPr>
         <p:txBody>
-          <a:bodyPr wrap="square" anchor="t" lIns="0" rIns="0" tIns="0" bIns="0">
+          <a:bodyPr wrap="square" lIns="0" rIns="0" tIns="0" bIns="0">
             <a:spAutoFit/>
           </a:bodyPr>
           <a:lstStyle/>
           <a:p>
-            <a:r>
-              <a:rPr sz="2860">
+            <a:pPr>
+              <a:lnSpc>
+                <a:spcPts val="900"/>
+              </a:lnSpc>
+              <a:spcBef>
+                <a:spcPts val="0"/>
+              </a:spcBef>
+            </a:pPr>
+            <a:r>
+              <a:rPr sz="780">
                 <a:solidFill>
-                  <a:srgbClr val="4DAAD8"/>
+                  <a:srgbClr val="ABB2B8"/>
                 </a:solidFill>
-                <a:latin typeface="Geist Light"/>
+                <a:latin typeface="Geist"/>
               </a:rPr>
-              <a:t>1</a:t>
-            </a:r>
-          </a:p>
-        </p:txBody>
-      </p:sp>
-      <p:sp>
-        <p:nvSpPr>
-          <p:cNvPr id="8" name="TextBox 7"/>
-          <p:cNvSpPr txBox="1"/>
-          <p:nvPr/>
-        </p:nvSpPr>
-        <p:spPr>
-          <a:xfrm>
-            <a:off x="609606" y="1571640"/>
-            <a:ext cx="3383313" cy="495305"/>
-          </a:xfrm>
-          <a:prstGeom prst="rect">
-            <a:avLst/>
-          </a:prstGeom>
-          <a:noFill/>
-        </p:spPr>
-        <p:txBody>
-          <a:bodyPr wrap="square" anchor="t" lIns="0" rIns="0" tIns="0" bIns="0">
-            <a:spAutoFit/>
-          </a:bodyPr>
-          <a:lstStyle/>
-          <a:p>
-            <a:r>
-              <a:rPr sz="1510">
-                <a:solidFill>
-                  <a:srgbClr val="FFFFFF"/>
-                </a:solidFill>
-                <a:latin typeface="Geist Medium"/>
-              </a:rPr>
-              <a:t>First message as one statement</a:t>
-            </a:r>
-          </a:p>
-        </p:txBody>
-      </p:sp>
-      <p:sp>
-        <p:nvSpPr>
-          <p:cNvPr id="9" name="Rounded Rectangle 8"/>
+              <a:t>Author+ YY Journal</a:t>
+            </a:r>
+          </a:p>
+        </p:txBody>
+      </p:sp>
+      <p:sp>
+        <p:nvSpPr>
+          <p:cNvPr id="11" name="Rounded Rectangle 10"/>
           <p:cNvSpPr/>
           <p:nvPr/>
         </p:nvSpPr>
         <p:spPr>
           <a:xfrm>
-            <a:off x="763254" y="2293643"/>
-            <a:ext cx="2771215" cy="1777730"/>
+            <a:off x="782304" y="4332931"/>
+            <a:ext cx="2733115" cy="1753917"/>
           </a:xfrm>
           <a:prstGeom prst="roundRect">
             <a:avLst>
-              <a:gd name="adj" fmla="val 3429"/>
+              <a:gd name="adj" fmla="val 3475"/>
             </a:avLst>
           </a:prstGeom>
           <a:solidFill>
@@ -3425,7 +3533,7 @@
       </p:sp>
       <p:pic>
         <p:nvPicPr>
-          <p:cNvPr id="10" name="Picture 9" descr="image.png"/>
+          <p:cNvPr id="12" name="Picture 11" descr="poster-placeholder.png"/>
           <p:cNvPicPr>
             <a:picLocks noChangeAspect="1"/>
           </p:cNvPicPr>
@@ -3439,8 +3547,8 @@
         </p:blipFill>
         <p:spPr>
           <a:xfrm>
-            <a:off x="824214" y="2354603"/>
-            <a:ext cx="2649294" cy="1655809"/>
+            <a:off x="843264" y="4393892"/>
+            <a:ext cx="2611193" cy="1631996"/>
           </a:xfrm>
           <a:prstGeom prst="rect">
             <a:avLst/>
@@ -3449,14 +3557,14 @@
       </p:pic>
       <p:sp>
         <p:nvSpPr>
-          <p:cNvPr id="11" name="TextBox 10"/>
+          <p:cNvPr id="13" name="TextBox 12"/>
           <p:cNvSpPr txBox="1"/>
           <p:nvPr/>
         </p:nvSpPr>
         <p:spPr>
           <a:xfrm>
-            <a:off x="304803" y="4117093"/>
-            <a:ext cx="3688116" cy="198122"/>
+            <a:off x="304803" y="6132569"/>
+            <a:ext cx="3688116" cy="161546"/>
           </a:xfrm>
           <a:prstGeom prst="rect">
             <a:avLst/>
@@ -3464,11 +3572,19 @@
           <a:noFill/>
         </p:spPr>
         <p:txBody>
-          <a:bodyPr wrap="square" anchor="t" lIns="0" rIns="0" tIns="0" bIns="0">
+          <a:bodyPr wrap="square" lIns="0" rIns="0" tIns="0" bIns="0">
             <a:spAutoFit/>
           </a:bodyPr>
           <a:lstStyle/>
           <a:p>
+            <a:pPr>
+              <a:lnSpc>
+                <a:spcPts val="900"/>
+              </a:lnSpc>
+              <a:spcBef>
+                <a:spcPts val="0"/>
+              </a:spcBef>
+            </a:pPr>
             <a:r>
               <a:rPr sz="780">
                 <a:solidFill>
@@ -3476,29 +3592,27 @@
                 </a:solidFill>
                 <a:latin typeface="Geist"/>
               </a:rPr>
-              <a:t>Author+ YY Journal</a:t>
-            </a:r>
-          </a:p>
-        </p:txBody>
-      </p:sp>
-      <p:sp>
-        <p:nvSpPr>
-          <p:cNvPr id="12" name="Rounded Rectangle 11"/>
+              <a:t>Second+ YY Journal</a:t>
+            </a:r>
+          </a:p>
+        </p:txBody>
+      </p:sp>
+      <p:sp>
+        <p:nvSpPr>
+          <p:cNvPr id="14" name="Rectangle 13"/>
           <p:cNvSpPr/>
           <p:nvPr/>
         </p:nvSpPr>
         <p:spPr>
           <a:xfrm>
-            <a:off x="763254" y="4309119"/>
-            <a:ext cx="2771215" cy="1777730"/>
-          </a:xfrm>
-          <a:prstGeom prst="roundRect">
-            <a:avLst>
-              <a:gd name="adj" fmla="val 3429"/>
-            </a:avLst>
+            <a:off x="4114841" y="1524015"/>
+            <a:ext cx="7620" cy="4800580"/>
+          </a:xfrm>
+          <a:prstGeom prst="rect">
+            <a:avLst/>
           </a:prstGeom>
           <a:solidFill>
-            <a:srgbClr val="FFFFFF"/>
+            <a:srgbClr val="2A343C"/>
           </a:solidFill>
           <a:ln>
             <a:noFill/>
@@ -3527,40 +3641,58 @@
           </a:p>
         </p:txBody>
       </p:sp>
-      <p:pic>
-        <p:nvPicPr>
-          <p:cNvPr id="13" name="Picture 12" descr="image.png"/>
-          <p:cNvPicPr>
-            <a:picLocks noChangeAspect="1"/>
-          </p:cNvPicPr>
+      <p:sp>
+        <p:nvSpPr>
+          <p:cNvPr id="15" name="TextBox 14"/>
+          <p:cNvSpPr txBox="1"/>
           <p:nvPr/>
-        </p:nvPicPr>
-        <p:blipFill>
-          <a:blip r:embed="rId3"/>
-          <a:stretch>
-            <a:fillRect/>
-          </a:stretch>
-        </p:blipFill>
-        <p:spPr>
-          <a:xfrm>
-            <a:off x="824214" y="4370079"/>
-            <a:ext cx="2649294" cy="1655809"/>
+        </p:nvSpPr>
+        <p:spPr>
+          <a:xfrm>
+            <a:off x="4252002" y="1524015"/>
+            <a:ext cx="304803" cy="381004"/>
           </a:xfrm>
           <a:prstGeom prst="rect">
             <a:avLst/>
           </a:prstGeom>
-        </p:spPr>
-      </p:pic>
-      <p:sp>
-        <p:nvSpPr>
-          <p:cNvPr id="14" name="TextBox 13"/>
+          <a:noFill/>
+        </p:spPr>
+        <p:txBody>
+          <a:bodyPr wrap="square" lIns="0" rIns="0" tIns="0" bIns="0">
+            <a:spAutoFit/>
+          </a:bodyPr>
+          <a:lstStyle/>
+          <a:p>
+            <a:pPr>
+              <a:lnSpc>
+                <a:spcPts val="2850"/>
+              </a:lnSpc>
+              <a:spcBef>
+                <a:spcPts val="0"/>
+              </a:spcBef>
+            </a:pPr>
+            <a:r>
+              <a:rPr sz="2850">
+                <a:solidFill>
+                  <a:srgbClr val="4DAAD8"/>
+                </a:solidFill>
+                <a:latin typeface="Geist Light"/>
+              </a:rPr>
+              <a:t>2</a:t>
+            </a:r>
+          </a:p>
+        </p:txBody>
+      </p:sp>
+      <p:sp>
+        <p:nvSpPr>
+          <p:cNvPr id="16" name="TextBox 15"/>
           <p:cNvSpPr txBox="1"/>
           <p:nvPr/>
         </p:nvSpPr>
         <p:spPr>
           <a:xfrm>
-            <a:off x="304803" y="6132569"/>
-            <a:ext cx="3688116" cy="198122"/>
+            <a:off x="4556805" y="1571640"/>
+            <a:ext cx="3383313" cy="342903"/>
           </a:xfrm>
           <a:prstGeom prst="rect">
             <a:avLst/>
@@ -3568,39 +3700,49 @@
           <a:noFill/>
         </p:spPr>
         <p:txBody>
-          <a:bodyPr wrap="square" anchor="t" lIns="0" rIns="0" tIns="0" bIns="0">
+          <a:bodyPr wrap="square" lIns="0" rIns="0" tIns="0" bIns="0">
             <a:spAutoFit/>
           </a:bodyPr>
           <a:lstStyle/>
           <a:p>
-            <a:r>
-              <a:rPr sz="780">
+            <a:pPr>
+              <a:lnSpc>
+                <a:spcPts val="1680"/>
+              </a:lnSpc>
+              <a:spcBef>
+                <a:spcPts val="0"/>
+              </a:spcBef>
+            </a:pPr>
+            <a:r>
+              <a:rPr sz="1500">
                 <a:solidFill>
-                  <a:srgbClr val="ABB2B8"/>
+                  <a:srgbClr val="FFFFFF"/>
                 </a:solidFill>
-                <a:latin typeface="Geist"/>
+                <a:latin typeface="Geist Medium"/>
               </a:rPr>
-              <a:t>Author+ YY Journal</a:t>
-            </a:r>
-          </a:p>
-        </p:txBody>
-      </p:sp>
-      <p:sp>
-        <p:nvSpPr>
-          <p:cNvPr id="15" name="Rectangle 14"/>
+              <a:t>Second message as one statement</a:t>
+            </a:r>
+          </a:p>
+        </p:txBody>
+      </p:sp>
+      <p:sp>
+        <p:nvSpPr>
+          <p:cNvPr id="17" name="Rounded Rectangle 16"/>
           <p:cNvSpPr/>
           <p:nvPr/>
         </p:nvSpPr>
         <p:spPr>
           <a:xfrm>
-            <a:off x="8062039" y="1524015"/>
-            <a:ext cx="7620" cy="4800580"/>
-          </a:xfrm>
-          <a:prstGeom prst="rect">
-            <a:avLst/>
+            <a:off x="4729503" y="2341268"/>
+            <a:ext cx="2733115" cy="1753917"/>
+          </a:xfrm>
+          <a:prstGeom prst="roundRect">
+            <a:avLst>
+              <a:gd name="adj" fmla="val 3475"/>
+            </a:avLst>
           </a:prstGeom>
           <a:solidFill>
-            <a:srgbClr val="2A343C"/>
+            <a:srgbClr val="FFFFFF"/>
           </a:solidFill>
           <a:ln>
             <a:noFill/>
@@ -3629,16 +3771,40 @@
           </a:p>
         </p:txBody>
       </p:sp>
-      <p:sp>
-        <p:nvSpPr>
-          <p:cNvPr id="16" name="TextBox 15"/>
+      <p:pic>
+        <p:nvPicPr>
+          <p:cNvPr id="18" name="Picture 17" descr="poster-placeholder.png"/>
+          <p:cNvPicPr>
+            <a:picLocks noChangeAspect="1"/>
+          </p:cNvPicPr>
+          <p:nvPr/>
+        </p:nvPicPr>
+        <p:blipFill>
+          <a:blip r:embed="rId3"/>
+          <a:stretch>
+            <a:fillRect/>
+          </a:stretch>
+        </p:blipFill>
+        <p:spPr>
+          <a:xfrm>
+            <a:off x="4790463" y="2402229"/>
+            <a:ext cx="2611193" cy="1631996"/>
+          </a:xfrm>
+          <a:prstGeom prst="rect">
+            <a:avLst/>
+          </a:prstGeom>
+        </p:spPr>
+      </p:pic>
+      <p:sp>
+        <p:nvSpPr>
+          <p:cNvPr id="19" name="TextBox 18"/>
           <p:cNvSpPr txBox="1"/>
           <p:nvPr/>
         </p:nvSpPr>
         <p:spPr>
           <a:xfrm>
-            <a:off x="4252002" y="1524015"/>
-            <a:ext cx="304803" cy="381004"/>
+            <a:off x="4252002" y="4140906"/>
+            <a:ext cx="3688116" cy="161546"/>
           </a:xfrm>
           <a:prstGeom prst="rect">
             <a:avLst/>
@@ -3646,71 +3812,45 @@
           <a:noFill/>
         </p:spPr>
         <p:txBody>
-          <a:bodyPr wrap="square" anchor="t" lIns="0" rIns="0" tIns="0" bIns="0">
+          <a:bodyPr wrap="square" lIns="0" rIns="0" tIns="0" bIns="0">
             <a:spAutoFit/>
           </a:bodyPr>
           <a:lstStyle/>
           <a:p>
-            <a:r>
-              <a:rPr sz="2860">
+            <a:pPr>
+              <a:lnSpc>
+                <a:spcPts val="900"/>
+              </a:lnSpc>
+              <a:spcBef>
+                <a:spcPts val="0"/>
+              </a:spcBef>
+            </a:pPr>
+            <a:r>
+              <a:rPr sz="780">
                 <a:solidFill>
-                  <a:srgbClr val="4DAAD8"/>
+                  <a:srgbClr val="ABB2B8"/>
                 </a:solidFill>
-                <a:latin typeface="Geist Light"/>
+                <a:latin typeface="Geist"/>
               </a:rPr>
-              <a:t>2</a:t>
-            </a:r>
-          </a:p>
-        </p:txBody>
-      </p:sp>
-      <p:sp>
-        <p:nvSpPr>
-          <p:cNvPr id="17" name="TextBox 16"/>
-          <p:cNvSpPr txBox="1"/>
-          <p:nvPr/>
-        </p:nvSpPr>
-        <p:spPr>
-          <a:xfrm>
-            <a:off x="4556805" y="1571640"/>
-            <a:ext cx="3383313" cy="495305"/>
-          </a:xfrm>
-          <a:prstGeom prst="rect">
-            <a:avLst/>
-          </a:prstGeom>
-          <a:noFill/>
-        </p:spPr>
-        <p:txBody>
-          <a:bodyPr wrap="square" anchor="t" lIns="0" rIns="0" tIns="0" bIns="0">
-            <a:spAutoFit/>
-          </a:bodyPr>
-          <a:lstStyle/>
-          <a:p>
-            <a:r>
-              <a:rPr sz="1510">
-                <a:solidFill>
-                  <a:srgbClr val="FFFFFF"/>
-                </a:solidFill>
-                <a:latin typeface="Geist Medium"/>
-              </a:rPr>
-              <a:t>Second message as one statement</a:t>
-            </a:r>
-          </a:p>
-        </p:txBody>
-      </p:sp>
-      <p:sp>
-        <p:nvSpPr>
-          <p:cNvPr id="18" name="Rounded Rectangle 17"/>
+              <a:t>Third+ YY Journal</a:t>
+            </a:r>
+          </a:p>
+        </p:txBody>
+      </p:sp>
+      <p:sp>
+        <p:nvSpPr>
+          <p:cNvPr id="20" name="Rounded Rectangle 19"/>
           <p:cNvSpPr/>
           <p:nvPr/>
         </p:nvSpPr>
         <p:spPr>
           <a:xfrm>
-            <a:off x="4710453" y="2293643"/>
-            <a:ext cx="2771215" cy="1777730"/>
+            <a:off x="4729503" y="4332931"/>
+            <a:ext cx="2733115" cy="1753917"/>
           </a:xfrm>
           <a:prstGeom prst="roundRect">
             <a:avLst>
-              <a:gd name="adj" fmla="val 3429"/>
+              <a:gd name="adj" fmla="val 3475"/>
             </a:avLst>
           </a:prstGeom>
           <a:solidFill>
@@ -3745,7 +3885,7 @@
       </p:sp>
       <p:pic>
         <p:nvPicPr>
-          <p:cNvPr id="19" name="Picture 18" descr="image.png"/>
+          <p:cNvPr id="21" name="Picture 20" descr="poster-placeholder.png"/>
           <p:cNvPicPr>
             <a:picLocks noChangeAspect="1"/>
           </p:cNvPicPr>
@@ -3759,8 +3899,8 @@
         </p:blipFill>
         <p:spPr>
           <a:xfrm>
-            <a:off x="4771413" y="2354603"/>
-            <a:ext cx="2649294" cy="1655809"/>
+            <a:off x="4790463" y="4393892"/>
+            <a:ext cx="2611193" cy="1631996"/>
           </a:xfrm>
           <a:prstGeom prst="rect">
             <a:avLst/>
@@ -3769,14 +3909,14 @@
       </p:pic>
       <p:sp>
         <p:nvSpPr>
-          <p:cNvPr id="20" name="TextBox 19"/>
+          <p:cNvPr id="22" name="TextBox 21"/>
           <p:cNvSpPr txBox="1"/>
           <p:nvPr/>
         </p:nvSpPr>
         <p:spPr>
           <a:xfrm>
-            <a:off x="4252002" y="4117093"/>
-            <a:ext cx="3688116" cy="198122"/>
+            <a:off x="4252002" y="6132569"/>
+            <a:ext cx="3688116" cy="161546"/>
           </a:xfrm>
           <a:prstGeom prst="rect">
             <a:avLst/>
@@ -3784,11 +3924,19 @@
           <a:noFill/>
         </p:spPr>
         <p:txBody>
-          <a:bodyPr wrap="square" anchor="t" lIns="0" rIns="0" tIns="0" bIns="0">
+          <a:bodyPr wrap="square" lIns="0" rIns="0" tIns="0" bIns="0">
             <a:spAutoFit/>
           </a:bodyPr>
           <a:lstStyle/>
           <a:p>
+            <a:pPr>
+              <a:lnSpc>
+                <a:spcPts val="900"/>
+              </a:lnSpc>
+              <a:spcBef>
+                <a:spcPts val="0"/>
+              </a:spcBef>
+            </a:pPr>
             <a:r>
               <a:rPr sz="780">
                 <a:solidFill>
@@ -3796,29 +3944,27 @@
                 </a:solidFill>
                 <a:latin typeface="Geist"/>
               </a:rPr>
-              <a:t>Author+ YY Journal</a:t>
-            </a:r>
-          </a:p>
-        </p:txBody>
-      </p:sp>
-      <p:sp>
-        <p:nvSpPr>
-          <p:cNvPr id="21" name="Rounded Rectangle 20"/>
+              <a:t>Fourth+ YY Journal</a:t>
+            </a:r>
+          </a:p>
+        </p:txBody>
+      </p:sp>
+      <p:sp>
+        <p:nvSpPr>
+          <p:cNvPr id="23" name="Rectangle 22"/>
           <p:cNvSpPr/>
           <p:nvPr/>
         </p:nvSpPr>
         <p:spPr>
           <a:xfrm>
-            <a:off x="4710453" y="4309119"/>
-            <a:ext cx="2771215" cy="1777730"/>
-          </a:xfrm>
-          <a:prstGeom prst="roundRect">
-            <a:avLst>
-              <a:gd name="adj" fmla="val 3429"/>
-            </a:avLst>
+            <a:off x="8062039" y="1524015"/>
+            <a:ext cx="7620" cy="4800580"/>
+          </a:xfrm>
+          <a:prstGeom prst="rect">
+            <a:avLst/>
           </a:prstGeom>
           <a:solidFill>
-            <a:srgbClr val="FFFFFF"/>
+            <a:srgbClr val="2A343C"/>
           </a:solidFill>
           <a:ln>
             <a:noFill/>
@@ -3847,64 +3993,6 @@
           </a:p>
         </p:txBody>
       </p:sp>
-      <p:pic>
-        <p:nvPicPr>
-          <p:cNvPr id="22" name="Picture 21" descr="image.png"/>
-          <p:cNvPicPr>
-            <a:picLocks noChangeAspect="1"/>
-          </p:cNvPicPr>
-          <p:nvPr/>
-        </p:nvPicPr>
-        <p:blipFill>
-          <a:blip r:embed="rId3"/>
-          <a:stretch>
-            <a:fillRect/>
-          </a:stretch>
-        </p:blipFill>
-        <p:spPr>
-          <a:xfrm>
-            <a:off x="4771413" y="4370079"/>
-            <a:ext cx="2649294" cy="1655809"/>
-          </a:xfrm>
-          <a:prstGeom prst="rect">
-            <a:avLst/>
-          </a:prstGeom>
-        </p:spPr>
-      </p:pic>
-      <p:sp>
-        <p:nvSpPr>
-          <p:cNvPr id="23" name="TextBox 22"/>
-          <p:cNvSpPr txBox="1"/>
-          <p:nvPr/>
-        </p:nvSpPr>
-        <p:spPr>
-          <a:xfrm>
-            <a:off x="4252002" y="6132569"/>
-            <a:ext cx="3688116" cy="198122"/>
-          </a:xfrm>
-          <a:prstGeom prst="rect">
-            <a:avLst/>
-          </a:prstGeom>
-          <a:noFill/>
-        </p:spPr>
-        <p:txBody>
-          <a:bodyPr wrap="square" anchor="t" lIns="0" rIns="0" tIns="0" bIns="0">
-            <a:spAutoFit/>
-          </a:bodyPr>
-          <a:lstStyle/>
-          <a:p>
-            <a:r>
-              <a:rPr sz="780">
-                <a:solidFill>
-                  <a:srgbClr val="ABB2B8"/>
-                </a:solidFill>
-                <a:latin typeface="Geist"/>
-              </a:rPr>
-              <a:t>Author+ YY Journal</a:t>
-            </a:r>
-          </a:p>
-        </p:txBody>
-      </p:sp>
       <p:sp>
         <p:nvSpPr>
           <p:cNvPr id="24" name="TextBox 23"/>
@@ -3922,13 +4010,21 @@
           <a:noFill/>
         </p:spPr>
         <p:txBody>
-          <a:bodyPr wrap="square" anchor="t" lIns="0" rIns="0" tIns="0" bIns="0">
+          <a:bodyPr wrap="square" lIns="0" rIns="0" tIns="0" bIns="0">
             <a:spAutoFit/>
           </a:bodyPr>
           <a:lstStyle/>
           <a:p>
-            <a:r>
-              <a:rPr sz="2860">
+            <a:pPr>
+              <a:lnSpc>
+                <a:spcPts val="2850"/>
+              </a:lnSpc>
+              <a:spcBef>
+                <a:spcPts val="0"/>
+              </a:spcBef>
+            </a:pPr>
+            <a:r>
+              <a:rPr sz="2850">
                 <a:solidFill>
                   <a:srgbClr val="4DAAD8"/>
                 </a:solidFill>
@@ -3948,7 +4044,7 @@
         <p:spPr>
           <a:xfrm>
             <a:off x="8504004" y="1571640"/>
-            <a:ext cx="3383313" cy="495305"/>
+            <a:ext cx="3383313" cy="342903"/>
           </a:xfrm>
           <a:prstGeom prst="rect">
             <a:avLst/>
@@ -3956,13 +4052,21 @@
           <a:noFill/>
         </p:spPr>
         <p:txBody>
-          <a:bodyPr wrap="square" anchor="t" lIns="0" rIns="0" tIns="0" bIns="0">
+          <a:bodyPr wrap="square" lIns="0" rIns="0" tIns="0" bIns="0">
             <a:spAutoFit/>
           </a:bodyPr>
           <a:lstStyle/>
           <a:p>
-            <a:r>
-              <a:rPr sz="1510">
+            <a:pPr>
+              <a:lnSpc>
+                <a:spcPts val="1680"/>
+              </a:lnSpc>
+              <a:spcBef>
+                <a:spcPts val="0"/>
+              </a:spcBef>
+            </a:pPr>
+            <a:r>
+              <a:rPr sz="1500">
                 <a:solidFill>
                   <a:srgbClr val="FFFFFF"/>
                 </a:solidFill>
@@ -3981,12 +4085,12 @@
         </p:nvSpPr>
         <p:spPr>
           <a:xfrm>
-            <a:off x="8657651" y="2293643"/>
-            <a:ext cx="2771215" cy="1777730"/>
+            <a:off x="8676702" y="2341268"/>
+            <a:ext cx="2733115" cy="1753917"/>
           </a:xfrm>
           <a:prstGeom prst="roundRect">
             <a:avLst>
-              <a:gd name="adj" fmla="val 3429"/>
+              <a:gd name="adj" fmla="val 3475"/>
             </a:avLst>
           </a:prstGeom>
           <a:solidFill>
@@ -4021,7 +4125,7 @@
       </p:sp>
       <p:pic>
         <p:nvPicPr>
-          <p:cNvPr id="27" name="Picture 26" descr="image.png"/>
+          <p:cNvPr id="27" name="Picture 26" descr="poster-placeholder.png"/>
           <p:cNvPicPr>
             <a:picLocks noChangeAspect="1"/>
           </p:cNvPicPr>
@@ -4035,8 +4139,8 @@
         </p:blipFill>
         <p:spPr>
           <a:xfrm>
-            <a:off x="8718612" y="2354603"/>
-            <a:ext cx="2649294" cy="1655809"/>
+            <a:off x="8737662" y="2402229"/>
+            <a:ext cx="2611193" cy="1631996"/>
           </a:xfrm>
           <a:prstGeom prst="rect">
             <a:avLst/>
@@ -4051,8 +4155,8 @@
         </p:nvSpPr>
         <p:spPr>
           <a:xfrm>
-            <a:off x="8199201" y="4117093"/>
-            <a:ext cx="3688116" cy="198122"/>
+            <a:off x="8199201" y="4140906"/>
+            <a:ext cx="3688116" cy="161546"/>
           </a:xfrm>
           <a:prstGeom prst="rect">
             <a:avLst/>
@@ -4060,11 +4164,19 @@
           <a:noFill/>
         </p:spPr>
         <p:txBody>
-          <a:bodyPr wrap="square" anchor="t" lIns="0" rIns="0" tIns="0" bIns="0">
+          <a:bodyPr wrap="square" lIns="0" rIns="0" tIns="0" bIns="0">
             <a:spAutoFit/>
           </a:bodyPr>
           <a:lstStyle/>
           <a:p>
+            <a:pPr>
+              <a:lnSpc>
+                <a:spcPts val="900"/>
+              </a:lnSpc>
+              <a:spcBef>
+                <a:spcPts val="0"/>
+              </a:spcBef>
+            </a:pPr>
             <a:r>
               <a:rPr sz="780">
                 <a:solidFill>
@@ -4072,7 +4184,7 @@
                 </a:solidFill>
                 <a:latin typeface="Geist"/>
               </a:rPr>
-              <a:t>Author+ YY Journal</a:t>
+              <a:t>Fifth+ YY Journal</a:t>
             </a:r>
           </a:p>
         </p:txBody>
@@ -4085,12 +4197,12 @@
         </p:nvSpPr>
         <p:spPr>
           <a:xfrm>
-            <a:off x="8657651" y="4309119"/>
-            <a:ext cx="2771215" cy="1777730"/>
+            <a:off x="8676702" y="4332931"/>
+            <a:ext cx="2733115" cy="1753917"/>
           </a:xfrm>
           <a:prstGeom prst="roundRect">
             <a:avLst>
-              <a:gd name="adj" fmla="val 3429"/>
+              <a:gd name="adj" fmla="val 3475"/>
             </a:avLst>
           </a:prstGeom>
           <a:solidFill>
@@ -4125,7 +4237,7 @@
       </p:sp>
       <p:pic>
         <p:nvPicPr>
-          <p:cNvPr id="30" name="Picture 29" descr="image.png"/>
+          <p:cNvPr id="30" name="Picture 29" descr="poster-placeholder.png"/>
           <p:cNvPicPr>
             <a:picLocks noChangeAspect="1"/>
           </p:cNvPicPr>
@@ -4139,8 +4251,8 @@
         </p:blipFill>
         <p:spPr>
           <a:xfrm>
-            <a:off x="8718612" y="4370079"/>
-            <a:ext cx="2649294" cy="1655809"/>
+            <a:off x="8737662" y="4393892"/>
+            <a:ext cx="2611193" cy="1631996"/>
           </a:xfrm>
           <a:prstGeom prst="rect">
             <a:avLst/>
@@ -4156,7 +4268,7 @@
         <p:spPr>
           <a:xfrm>
             <a:off x="8199201" y="6132569"/>
-            <a:ext cx="3688116" cy="198122"/>
+            <a:ext cx="3688116" cy="161546"/>
           </a:xfrm>
           <a:prstGeom prst="rect">
             <a:avLst/>
@@ -4164,11 +4276,19 @@
           <a:noFill/>
         </p:spPr>
         <p:txBody>
-          <a:bodyPr wrap="square" anchor="t" lIns="0" rIns="0" tIns="0" bIns="0">
+          <a:bodyPr wrap="square" lIns="0" rIns="0" tIns="0" bIns="0">
             <a:spAutoFit/>
           </a:bodyPr>
           <a:lstStyle/>
           <a:p>
+            <a:pPr>
+              <a:lnSpc>
+                <a:spcPts val="900"/>
+              </a:lnSpc>
+              <a:spcBef>
+                <a:spcPts val="0"/>
+              </a:spcBef>
+            </a:pPr>
             <a:r>
               <a:rPr sz="780">
                 <a:solidFill>
@@ -4176,7 +4296,7 @@
                 </a:solidFill>
                 <a:latin typeface="Geist"/>
               </a:rPr>
-              <a:t>Author+ YY Journal</a:t>
+              <a:t>Sixth+ YY Journal</a:t>
             </a:r>
           </a:p>
         </p:txBody>
@@ -4189,8 +4309,8 @@
         </p:nvSpPr>
         <p:spPr>
           <a:xfrm>
-            <a:off x="304803" y="6516621"/>
-            <a:ext cx="11582514" cy="158498"/>
+            <a:off x="304803" y="6544358"/>
+            <a:ext cx="11582514" cy="130760"/>
           </a:xfrm>
           <a:prstGeom prst="rect">
             <a:avLst/>
@@ -4198,11 +4318,19 @@
           <a:noFill/>
         </p:spPr>
         <p:txBody>
-          <a:bodyPr wrap="square" anchor="b" lIns="0" rIns="0" tIns="0" bIns="0">
+          <a:bodyPr wrap="square" lIns="0" rIns="0" tIns="0" bIns="0">
             <a:spAutoFit/>
           </a:bodyPr>
           <a:lstStyle/>
           <a:p>
+            <a:pPr>
+              <a:lnSpc>
+                <a:spcPts val="1030"/>
+              </a:lnSpc>
+              <a:spcBef>
+                <a:spcPts val="0"/>
+              </a:spcBef>
+            </a:pPr>
             <a:r>
               <a:rPr sz="900">
                 <a:solidFill>
@@ -4362,7 +4490,7 @@
         <p:spPr>
           <a:xfrm>
             <a:off x="304803" y="194312"/>
-            <a:ext cx="8412563" cy="1036330"/>
+            <a:ext cx="8717366" cy="643134"/>
           </a:xfrm>
           <a:prstGeom prst="rect">
             <a:avLst/>
@@ -4370,13 +4498,21 @@
           <a:noFill/>
         </p:spPr>
         <p:txBody>
-          <a:bodyPr wrap="square" anchor="t" lIns="0" rIns="0" tIns="0" bIns="0">
+          <a:bodyPr wrap="square" lIns="0" rIns="0" tIns="0" bIns="0">
             <a:spAutoFit/>
           </a:bodyPr>
           <a:lstStyle/>
           <a:p>
-            <a:r>
-              <a:rPr sz="2410">
+            <a:pPr>
+              <a:lnSpc>
+                <a:spcPts val="2590"/>
+              </a:lnSpc>
+              <a:spcBef>
+                <a:spcPts val="0"/>
+              </a:spcBef>
+            </a:pPr>
+            <a:r>
+              <a:rPr sz="2400">
                 <a:solidFill>
                   <a:srgbClr val="010305"/>
                 </a:solidFill>
@@ -4386,6 +4522,14 @@
             </a:r>
           </a:p>
           <a:p>
+            <a:pPr>
+              <a:lnSpc>
+                <a:spcPts val="1210"/>
+              </a:lnSpc>
+              <a:spcBef>
+                <a:spcPts val="720"/>
+              </a:spcBef>
+            </a:pPr>
             <a:r>
               <a:rPr sz="1060">
                 <a:solidFill>
@@ -4397,8 +4541,16 @@
             </a:r>
           </a:p>
           <a:p>
-            <a:r>
-              <a:rPr sz="869">
+            <a:pPr>
+              <a:lnSpc>
+                <a:spcPts val="990"/>
+              </a:lnSpc>
+              <a:spcBef>
+                <a:spcPts val="240"/>
+              </a:spcBef>
+            </a:pPr>
+            <a:r>
+              <a:rPr sz="860">
                 <a:solidFill>
                   <a:srgbClr val="475159"/>
                 </a:solidFill>
@@ -4411,7 +4563,223 @@
       </p:sp>
       <p:sp>
         <p:nvSpPr>
-          <p:cNvPr id="6" name="Rectangle 5"/>
+          <p:cNvPr id="6" name="TextBox 5"/>
+          <p:cNvSpPr txBox="1"/>
+          <p:nvPr/>
+        </p:nvSpPr>
+        <p:spPr>
+          <a:xfrm>
+            <a:off x="304803" y="1524015"/>
+            <a:ext cx="304803" cy="381004"/>
+          </a:xfrm>
+          <a:prstGeom prst="rect">
+            <a:avLst/>
+          </a:prstGeom>
+          <a:noFill/>
+        </p:spPr>
+        <p:txBody>
+          <a:bodyPr wrap="square" lIns="0" rIns="0" tIns="0" bIns="0">
+            <a:spAutoFit/>
+          </a:bodyPr>
+          <a:lstStyle/>
+          <a:p>
+            <a:pPr>
+              <a:lnSpc>
+                <a:spcPts val="2850"/>
+              </a:lnSpc>
+              <a:spcBef>
+                <a:spcPts val="0"/>
+              </a:spcBef>
+            </a:pPr>
+            <a:r>
+              <a:rPr sz="2850">
+                <a:solidFill>
+                  <a:srgbClr val="0072A1"/>
+                </a:solidFill>
+                <a:latin typeface="Geist Light"/>
+              </a:rPr>
+              <a:t>1</a:t>
+            </a:r>
+          </a:p>
+        </p:txBody>
+      </p:sp>
+      <p:sp>
+        <p:nvSpPr>
+          <p:cNvPr id="7" name="TextBox 6"/>
+          <p:cNvSpPr txBox="1"/>
+          <p:nvPr/>
+        </p:nvSpPr>
+        <p:spPr>
+          <a:xfrm>
+            <a:off x="609606" y="1571640"/>
+            <a:ext cx="3383313" cy="342903"/>
+          </a:xfrm>
+          <a:prstGeom prst="rect">
+            <a:avLst/>
+          </a:prstGeom>
+          <a:noFill/>
+        </p:spPr>
+        <p:txBody>
+          <a:bodyPr wrap="square" lIns="0" rIns="0" tIns="0" bIns="0">
+            <a:spAutoFit/>
+          </a:bodyPr>
+          <a:lstStyle/>
+          <a:p>
+            <a:pPr>
+              <a:lnSpc>
+                <a:spcPts val="1680"/>
+              </a:lnSpc>
+              <a:spcBef>
+                <a:spcPts val="0"/>
+              </a:spcBef>
+            </a:pPr>
+            <a:r>
+              <a:rPr sz="1500">
+                <a:solidFill>
+                  <a:srgbClr val="010305"/>
+                </a:solidFill>
+                <a:latin typeface="Geist Medium"/>
+              </a:rPr>
+              <a:t>First message as one statement</a:t>
+            </a:r>
+          </a:p>
+        </p:txBody>
+      </p:sp>
+      <p:pic>
+        <p:nvPicPr>
+          <p:cNvPr id="8" name="Picture 7" descr="poster-placeholder.png"/>
+          <p:cNvPicPr>
+            <a:picLocks noChangeAspect="1"/>
+          </p:cNvPicPr>
+          <p:nvPr/>
+        </p:nvPicPr>
+        <p:blipFill>
+          <a:blip r:embed="rId3"/>
+          <a:stretch>
+            <a:fillRect/>
+          </a:stretch>
+        </p:blipFill>
+        <p:spPr>
+          <a:xfrm>
+            <a:off x="745728" y="2341268"/>
+            <a:ext cx="2806267" cy="1753917"/>
+          </a:xfrm>
+          <a:prstGeom prst="rect">
+            <a:avLst/>
+          </a:prstGeom>
+        </p:spPr>
+      </p:pic>
+      <p:sp>
+        <p:nvSpPr>
+          <p:cNvPr id="9" name="TextBox 8"/>
+          <p:cNvSpPr txBox="1"/>
+          <p:nvPr/>
+        </p:nvSpPr>
+        <p:spPr>
+          <a:xfrm>
+            <a:off x="304803" y="4140906"/>
+            <a:ext cx="3688116" cy="161546"/>
+          </a:xfrm>
+          <a:prstGeom prst="rect">
+            <a:avLst/>
+          </a:prstGeom>
+          <a:noFill/>
+        </p:spPr>
+        <p:txBody>
+          <a:bodyPr wrap="square" lIns="0" rIns="0" tIns="0" bIns="0">
+            <a:spAutoFit/>
+          </a:bodyPr>
+          <a:lstStyle/>
+          <a:p>
+            <a:pPr>
+              <a:lnSpc>
+                <a:spcPts val="900"/>
+              </a:lnSpc>
+              <a:spcBef>
+                <a:spcPts val="0"/>
+              </a:spcBef>
+            </a:pPr>
+            <a:r>
+              <a:rPr sz="780">
+                <a:solidFill>
+                  <a:srgbClr val="475159"/>
+                </a:solidFill>
+                <a:latin typeface="Geist"/>
+              </a:rPr>
+              <a:t>Author+ YY Journal</a:t>
+            </a:r>
+          </a:p>
+        </p:txBody>
+      </p:sp>
+      <p:pic>
+        <p:nvPicPr>
+          <p:cNvPr id="10" name="Picture 9" descr="poster-placeholder.png"/>
+          <p:cNvPicPr>
+            <a:picLocks noChangeAspect="1"/>
+          </p:cNvPicPr>
+          <p:nvPr/>
+        </p:nvPicPr>
+        <p:blipFill>
+          <a:blip r:embed="rId3"/>
+          <a:stretch>
+            <a:fillRect/>
+          </a:stretch>
+        </p:blipFill>
+        <p:spPr>
+          <a:xfrm>
+            <a:off x="745728" y="4332931"/>
+            <a:ext cx="2806267" cy="1753917"/>
+          </a:xfrm>
+          <a:prstGeom prst="rect">
+            <a:avLst/>
+          </a:prstGeom>
+        </p:spPr>
+      </p:pic>
+      <p:sp>
+        <p:nvSpPr>
+          <p:cNvPr id="11" name="TextBox 10"/>
+          <p:cNvSpPr txBox="1"/>
+          <p:nvPr/>
+        </p:nvSpPr>
+        <p:spPr>
+          <a:xfrm>
+            <a:off x="304803" y="6132569"/>
+            <a:ext cx="3688116" cy="161546"/>
+          </a:xfrm>
+          <a:prstGeom prst="rect">
+            <a:avLst/>
+          </a:prstGeom>
+          <a:noFill/>
+        </p:spPr>
+        <p:txBody>
+          <a:bodyPr wrap="square" lIns="0" rIns="0" tIns="0" bIns="0">
+            <a:spAutoFit/>
+          </a:bodyPr>
+          <a:lstStyle/>
+          <a:p>
+            <a:pPr>
+              <a:lnSpc>
+                <a:spcPts val="900"/>
+              </a:lnSpc>
+              <a:spcBef>
+                <a:spcPts val="0"/>
+              </a:spcBef>
+            </a:pPr>
+            <a:r>
+              <a:rPr sz="780">
+                <a:solidFill>
+                  <a:srgbClr val="475159"/>
+                </a:solidFill>
+                <a:latin typeface="Geist"/>
+              </a:rPr>
+              <a:t>Second+ YY Journal</a:t>
+            </a:r>
+          </a:p>
+        </p:txBody>
+      </p:sp>
+      <p:sp>
+        <p:nvSpPr>
+          <p:cNvPr id="12" name="Rectangle 11"/>
           <p:cNvSpPr/>
           <p:nvPr/>
         </p:nvSpPr>
@@ -4455,13 +4823,13 @@
       </p:sp>
       <p:sp>
         <p:nvSpPr>
-          <p:cNvPr id="7" name="TextBox 6"/>
+          <p:cNvPr id="13" name="TextBox 12"/>
           <p:cNvSpPr txBox="1"/>
           <p:nvPr/>
         </p:nvSpPr>
         <p:spPr>
           <a:xfrm>
-            <a:off x="304803" y="1524015"/>
+            <a:off x="4252002" y="1524015"/>
             <a:ext cx="304803" cy="381004"/>
           </a:xfrm>
           <a:prstGeom prst="rect">
@@ -4470,33 +4838,41 @@
           <a:noFill/>
         </p:spPr>
         <p:txBody>
-          <a:bodyPr wrap="square" anchor="t" lIns="0" rIns="0" tIns="0" bIns="0">
+          <a:bodyPr wrap="square" lIns="0" rIns="0" tIns="0" bIns="0">
             <a:spAutoFit/>
           </a:bodyPr>
           <a:lstStyle/>
           <a:p>
-            <a:r>
-              <a:rPr sz="2860">
+            <a:pPr>
+              <a:lnSpc>
+                <a:spcPts val="2850"/>
+              </a:lnSpc>
+              <a:spcBef>
+                <a:spcPts val="0"/>
+              </a:spcBef>
+            </a:pPr>
+            <a:r>
+              <a:rPr sz="2850">
                 <a:solidFill>
                   <a:srgbClr val="0072A1"/>
                 </a:solidFill>
                 <a:latin typeface="Geist Light"/>
               </a:rPr>
-              <a:t>1</a:t>
-            </a:r>
-          </a:p>
-        </p:txBody>
-      </p:sp>
-      <p:sp>
-        <p:nvSpPr>
-          <p:cNvPr id="8" name="TextBox 7"/>
+              <a:t>2</a:t>
+            </a:r>
+          </a:p>
+        </p:txBody>
+      </p:sp>
+      <p:sp>
+        <p:nvSpPr>
+          <p:cNvPr id="14" name="TextBox 13"/>
           <p:cNvSpPr txBox="1"/>
           <p:nvPr/>
         </p:nvSpPr>
         <p:spPr>
           <a:xfrm>
-            <a:off x="609606" y="1571640"/>
-            <a:ext cx="3383313" cy="495305"/>
+            <a:off x="4556805" y="1571640"/>
+            <a:ext cx="3383313" cy="342903"/>
           </a:xfrm>
           <a:prstGeom prst="rect">
             <a:avLst/>
@@ -4504,26 +4880,34 @@
           <a:noFill/>
         </p:spPr>
         <p:txBody>
-          <a:bodyPr wrap="square" anchor="t" lIns="0" rIns="0" tIns="0" bIns="0">
+          <a:bodyPr wrap="square" lIns="0" rIns="0" tIns="0" bIns="0">
             <a:spAutoFit/>
           </a:bodyPr>
           <a:lstStyle/>
           <a:p>
-            <a:r>
-              <a:rPr sz="1510">
+            <a:pPr>
+              <a:lnSpc>
+                <a:spcPts val="1680"/>
+              </a:lnSpc>
+              <a:spcBef>
+                <a:spcPts val="0"/>
+              </a:spcBef>
+            </a:pPr>
+            <a:r>
+              <a:rPr sz="1500">
                 <a:solidFill>
                   <a:srgbClr val="010305"/>
                 </a:solidFill>
                 <a:latin typeface="Geist Medium"/>
               </a:rPr>
-              <a:t>First message as one statement</a:t>
+              <a:t>Second message as one statement</a:t>
             </a:r>
           </a:p>
         </p:txBody>
       </p:sp>
       <p:pic>
         <p:nvPicPr>
-          <p:cNvPr id="9" name="Picture 8" descr="image.png"/>
+          <p:cNvPr id="15" name="Picture 14" descr="poster-placeholder.png"/>
           <p:cNvPicPr>
             <a:picLocks noChangeAspect="1"/>
           </p:cNvPicPr>
@@ -4537,8 +4921,8 @@
         </p:blipFill>
         <p:spPr>
           <a:xfrm>
-            <a:off x="726677" y="2293643"/>
-            <a:ext cx="2844368" cy="1777730"/>
+            <a:off x="4692926" y="2341268"/>
+            <a:ext cx="2806267" cy="1753917"/>
           </a:xfrm>
           <a:prstGeom prst="rect">
             <a:avLst/>
@@ -4547,14 +4931,14 @@
       </p:pic>
       <p:sp>
         <p:nvSpPr>
-          <p:cNvPr id="10" name="TextBox 9"/>
+          <p:cNvPr id="16" name="TextBox 15"/>
           <p:cNvSpPr txBox="1"/>
           <p:nvPr/>
         </p:nvSpPr>
         <p:spPr>
           <a:xfrm>
-            <a:off x="304803" y="4117093"/>
-            <a:ext cx="3688116" cy="198122"/>
+            <a:off x="4252002" y="4140906"/>
+            <a:ext cx="3688116" cy="161546"/>
           </a:xfrm>
           <a:prstGeom prst="rect">
             <a:avLst/>
@@ -4562,11 +4946,19 @@
           <a:noFill/>
         </p:spPr>
         <p:txBody>
-          <a:bodyPr wrap="square" anchor="t" lIns="0" rIns="0" tIns="0" bIns="0">
+          <a:bodyPr wrap="square" lIns="0" rIns="0" tIns="0" bIns="0">
             <a:spAutoFit/>
           </a:bodyPr>
           <a:lstStyle/>
           <a:p>
+            <a:pPr>
+              <a:lnSpc>
+                <a:spcPts val="900"/>
+              </a:lnSpc>
+              <a:spcBef>
+                <a:spcPts val="0"/>
+              </a:spcBef>
+            </a:pPr>
             <a:r>
               <a:rPr sz="780">
                 <a:solidFill>
@@ -4574,14 +4966,14 @@
                 </a:solidFill>
                 <a:latin typeface="Geist"/>
               </a:rPr>
-              <a:t>Author+ YY Journal</a:t>
+              <a:t>Third+ YY Journal</a:t>
             </a:r>
           </a:p>
         </p:txBody>
       </p:sp>
       <p:pic>
         <p:nvPicPr>
-          <p:cNvPr id="11" name="Picture 10" descr="image.png"/>
+          <p:cNvPr id="17" name="Picture 16" descr="poster-placeholder.png"/>
           <p:cNvPicPr>
             <a:picLocks noChangeAspect="1"/>
           </p:cNvPicPr>
@@ -4595,8 +4987,8 @@
         </p:blipFill>
         <p:spPr>
           <a:xfrm>
-            <a:off x="726677" y="4309119"/>
-            <a:ext cx="2844368" cy="1777730"/>
+            <a:off x="4692926" y="4332931"/>
+            <a:ext cx="2806267" cy="1753917"/>
           </a:xfrm>
           <a:prstGeom prst="rect">
             <a:avLst/>
@@ -4605,14 +4997,14 @@
       </p:pic>
       <p:sp>
         <p:nvSpPr>
-          <p:cNvPr id="12" name="TextBox 11"/>
+          <p:cNvPr id="18" name="TextBox 17"/>
           <p:cNvSpPr txBox="1"/>
           <p:nvPr/>
         </p:nvSpPr>
         <p:spPr>
           <a:xfrm>
-            <a:off x="304803" y="6132569"/>
-            <a:ext cx="3688116" cy="198122"/>
+            <a:off x="4252002" y="6132569"/>
+            <a:ext cx="3688116" cy="161546"/>
           </a:xfrm>
           <a:prstGeom prst="rect">
             <a:avLst/>
@@ -4620,11 +5012,19 @@
           <a:noFill/>
         </p:spPr>
         <p:txBody>
-          <a:bodyPr wrap="square" anchor="t" lIns="0" rIns="0" tIns="0" bIns="0">
+          <a:bodyPr wrap="square" lIns="0" rIns="0" tIns="0" bIns="0">
             <a:spAutoFit/>
           </a:bodyPr>
           <a:lstStyle/>
           <a:p>
+            <a:pPr>
+              <a:lnSpc>
+                <a:spcPts val="900"/>
+              </a:lnSpc>
+              <a:spcBef>
+                <a:spcPts val="0"/>
+              </a:spcBef>
+            </a:pPr>
             <a:r>
               <a:rPr sz="780">
                 <a:solidFill>
@@ -4632,14 +5032,14 @@
                 </a:solidFill>
                 <a:latin typeface="Geist"/>
               </a:rPr>
-              <a:t>Author+ YY Journal</a:t>
-            </a:r>
-          </a:p>
-        </p:txBody>
-      </p:sp>
-      <p:sp>
-        <p:nvSpPr>
-          <p:cNvPr id="13" name="Rectangle 12"/>
+              <a:t>Fourth+ YY Journal</a:t>
+            </a:r>
+          </a:p>
+        </p:txBody>
+      </p:sp>
+      <p:sp>
+        <p:nvSpPr>
+          <p:cNvPr id="19" name="Rectangle 18"/>
           <p:cNvSpPr/>
           <p:nvPr/>
         </p:nvSpPr>
@@ -4683,13 +5083,13 @@
       </p:sp>
       <p:sp>
         <p:nvSpPr>
-          <p:cNvPr id="14" name="TextBox 13"/>
+          <p:cNvPr id="20" name="TextBox 19"/>
           <p:cNvSpPr txBox="1"/>
           <p:nvPr/>
         </p:nvSpPr>
         <p:spPr>
           <a:xfrm>
-            <a:off x="4252002" y="1524015"/>
+            <a:off x="8199201" y="1524015"/>
             <a:ext cx="304803" cy="381004"/>
           </a:xfrm>
           <a:prstGeom prst="rect">
@@ -4698,33 +5098,41 @@
           <a:noFill/>
         </p:spPr>
         <p:txBody>
-          <a:bodyPr wrap="square" anchor="t" lIns="0" rIns="0" tIns="0" bIns="0">
+          <a:bodyPr wrap="square" lIns="0" rIns="0" tIns="0" bIns="0">
             <a:spAutoFit/>
           </a:bodyPr>
           <a:lstStyle/>
           <a:p>
-            <a:r>
-              <a:rPr sz="2860">
+            <a:pPr>
+              <a:lnSpc>
+                <a:spcPts val="2850"/>
+              </a:lnSpc>
+              <a:spcBef>
+                <a:spcPts val="0"/>
+              </a:spcBef>
+            </a:pPr>
+            <a:r>
+              <a:rPr sz="2850">
                 <a:solidFill>
                   <a:srgbClr val="0072A1"/>
                 </a:solidFill>
                 <a:latin typeface="Geist Light"/>
               </a:rPr>
-              <a:t>2</a:t>
-            </a:r>
-          </a:p>
-        </p:txBody>
-      </p:sp>
-      <p:sp>
-        <p:nvSpPr>
-          <p:cNvPr id="15" name="TextBox 14"/>
+              <a:t>3</a:t>
+            </a:r>
+          </a:p>
+        </p:txBody>
+      </p:sp>
+      <p:sp>
+        <p:nvSpPr>
+          <p:cNvPr id="21" name="TextBox 20"/>
           <p:cNvSpPr txBox="1"/>
           <p:nvPr/>
         </p:nvSpPr>
         <p:spPr>
           <a:xfrm>
-            <a:off x="4556805" y="1571640"/>
-            <a:ext cx="3383313" cy="495305"/>
+            <a:off x="8504004" y="1571640"/>
+            <a:ext cx="3383313" cy="342903"/>
           </a:xfrm>
           <a:prstGeom prst="rect">
             <a:avLst/>
@@ -4732,26 +5140,34 @@
           <a:noFill/>
         </p:spPr>
         <p:txBody>
-          <a:bodyPr wrap="square" anchor="t" lIns="0" rIns="0" tIns="0" bIns="0">
+          <a:bodyPr wrap="square" lIns="0" rIns="0" tIns="0" bIns="0">
             <a:spAutoFit/>
           </a:bodyPr>
           <a:lstStyle/>
           <a:p>
-            <a:r>
-              <a:rPr sz="1510">
+            <a:pPr>
+              <a:lnSpc>
+                <a:spcPts val="1680"/>
+              </a:lnSpc>
+              <a:spcBef>
+                <a:spcPts val="0"/>
+              </a:spcBef>
+            </a:pPr>
+            <a:r>
+              <a:rPr sz="1500">
                 <a:solidFill>
                   <a:srgbClr val="010305"/>
                 </a:solidFill>
                 <a:latin typeface="Geist Medium"/>
               </a:rPr>
-              <a:t>Second message as one statement</a:t>
+              <a:t>Third message as one statement</a:t>
             </a:r>
           </a:p>
         </p:txBody>
       </p:sp>
       <p:pic>
         <p:nvPicPr>
-          <p:cNvPr id="16" name="Picture 15" descr="image.png"/>
+          <p:cNvPr id="22" name="Picture 21" descr="poster-placeholder.png"/>
           <p:cNvPicPr>
             <a:picLocks noChangeAspect="1"/>
           </p:cNvPicPr>
@@ -4765,8 +5181,8 @@
         </p:blipFill>
         <p:spPr>
           <a:xfrm>
-            <a:off x="4673876" y="2293643"/>
-            <a:ext cx="2844368" cy="1777730"/>
+            <a:off x="8640125" y="2341268"/>
+            <a:ext cx="2806267" cy="1753917"/>
           </a:xfrm>
           <a:prstGeom prst="rect">
             <a:avLst/>
@@ -4775,14 +5191,14 @@
       </p:pic>
       <p:sp>
         <p:nvSpPr>
-          <p:cNvPr id="17" name="TextBox 16"/>
+          <p:cNvPr id="23" name="TextBox 22"/>
           <p:cNvSpPr txBox="1"/>
           <p:nvPr/>
         </p:nvSpPr>
         <p:spPr>
           <a:xfrm>
-            <a:off x="4252002" y="4117093"/>
-            <a:ext cx="3688116" cy="198122"/>
+            <a:off x="8199201" y="4140906"/>
+            <a:ext cx="3688116" cy="161546"/>
           </a:xfrm>
           <a:prstGeom prst="rect">
             <a:avLst/>
@@ -4790,11 +5206,19 @@
           <a:noFill/>
         </p:spPr>
         <p:txBody>
-          <a:bodyPr wrap="square" anchor="t" lIns="0" rIns="0" tIns="0" bIns="0">
+          <a:bodyPr wrap="square" lIns="0" rIns="0" tIns="0" bIns="0">
             <a:spAutoFit/>
           </a:bodyPr>
           <a:lstStyle/>
           <a:p>
+            <a:pPr>
+              <a:lnSpc>
+                <a:spcPts val="900"/>
+              </a:lnSpc>
+              <a:spcBef>
+                <a:spcPts val="0"/>
+              </a:spcBef>
+            </a:pPr>
             <a:r>
               <a:rPr sz="780">
                 <a:solidFill>
@@ -4802,14 +5226,14 @@
                 </a:solidFill>
                 <a:latin typeface="Geist"/>
               </a:rPr>
-              <a:t>Author+ YY Journal</a:t>
+              <a:t>Fifth+ YY Journal</a:t>
             </a:r>
           </a:p>
         </p:txBody>
       </p:sp>
       <p:pic>
         <p:nvPicPr>
-          <p:cNvPr id="18" name="Picture 17" descr="image.png"/>
+          <p:cNvPr id="24" name="Picture 23" descr="poster-placeholder.png"/>
           <p:cNvPicPr>
             <a:picLocks noChangeAspect="1"/>
           </p:cNvPicPr>
@@ -4823,8 +5247,8 @@
         </p:blipFill>
         <p:spPr>
           <a:xfrm>
-            <a:off x="4673876" y="4309119"/>
-            <a:ext cx="2844368" cy="1777730"/>
+            <a:off x="8640125" y="4332931"/>
+            <a:ext cx="2806267" cy="1753917"/>
           </a:xfrm>
           <a:prstGeom prst="rect">
             <a:avLst/>
@@ -4833,14 +5257,14 @@
       </p:pic>
       <p:sp>
         <p:nvSpPr>
-          <p:cNvPr id="19" name="TextBox 18"/>
+          <p:cNvPr id="25" name="TextBox 24"/>
           <p:cNvSpPr txBox="1"/>
           <p:nvPr/>
         </p:nvSpPr>
         <p:spPr>
           <a:xfrm>
-            <a:off x="4252002" y="6132569"/>
-            <a:ext cx="3688116" cy="198122"/>
+            <a:off x="8199201" y="6132569"/>
+            <a:ext cx="3688116" cy="161546"/>
           </a:xfrm>
           <a:prstGeom prst="rect">
             <a:avLst/>
@@ -4848,11 +5272,19 @@
           <a:noFill/>
         </p:spPr>
         <p:txBody>
-          <a:bodyPr wrap="square" anchor="t" lIns="0" rIns="0" tIns="0" bIns="0">
+          <a:bodyPr wrap="square" lIns="0" rIns="0" tIns="0" bIns="0">
             <a:spAutoFit/>
           </a:bodyPr>
           <a:lstStyle/>
           <a:p>
+            <a:pPr>
+              <a:lnSpc>
+                <a:spcPts val="900"/>
+              </a:lnSpc>
+              <a:spcBef>
+                <a:spcPts val="0"/>
+              </a:spcBef>
+            </a:pPr>
             <a:r>
               <a:rPr sz="780">
                 <a:solidFill>
@@ -4860,191 +5292,7 @@
                 </a:solidFill>
                 <a:latin typeface="Geist"/>
               </a:rPr>
-              <a:t>Author+ YY Journal</a:t>
-            </a:r>
-          </a:p>
-        </p:txBody>
-      </p:sp>
-      <p:sp>
-        <p:nvSpPr>
-          <p:cNvPr id="20" name="TextBox 19"/>
-          <p:cNvSpPr txBox="1"/>
-          <p:nvPr/>
-        </p:nvSpPr>
-        <p:spPr>
-          <a:xfrm>
-            <a:off x="8199201" y="1524015"/>
-            <a:ext cx="304803" cy="381004"/>
-          </a:xfrm>
-          <a:prstGeom prst="rect">
-            <a:avLst/>
-          </a:prstGeom>
-          <a:noFill/>
-        </p:spPr>
-        <p:txBody>
-          <a:bodyPr wrap="square" anchor="t" lIns="0" rIns="0" tIns="0" bIns="0">
-            <a:spAutoFit/>
-          </a:bodyPr>
-          <a:lstStyle/>
-          <a:p>
-            <a:r>
-              <a:rPr sz="2860">
-                <a:solidFill>
-                  <a:srgbClr val="0072A1"/>
-                </a:solidFill>
-                <a:latin typeface="Geist Light"/>
-              </a:rPr>
-              <a:t>3</a:t>
-            </a:r>
-          </a:p>
-        </p:txBody>
-      </p:sp>
-      <p:sp>
-        <p:nvSpPr>
-          <p:cNvPr id="21" name="TextBox 20"/>
-          <p:cNvSpPr txBox="1"/>
-          <p:nvPr/>
-        </p:nvSpPr>
-        <p:spPr>
-          <a:xfrm>
-            <a:off x="8504004" y="1571640"/>
-            <a:ext cx="3383313" cy="495305"/>
-          </a:xfrm>
-          <a:prstGeom prst="rect">
-            <a:avLst/>
-          </a:prstGeom>
-          <a:noFill/>
-        </p:spPr>
-        <p:txBody>
-          <a:bodyPr wrap="square" anchor="t" lIns="0" rIns="0" tIns="0" bIns="0">
-            <a:spAutoFit/>
-          </a:bodyPr>
-          <a:lstStyle/>
-          <a:p>
-            <a:r>
-              <a:rPr sz="1510">
-                <a:solidFill>
-                  <a:srgbClr val="010305"/>
-                </a:solidFill>
-                <a:latin typeface="Geist Medium"/>
-              </a:rPr>
-              <a:t>Third message as one statement</a:t>
-            </a:r>
-          </a:p>
-        </p:txBody>
-      </p:sp>
-      <p:pic>
-        <p:nvPicPr>
-          <p:cNvPr id="22" name="Picture 21" descr="image.png"/>
-          <p:cNvPicPr>
-            <a:picLocks noChangeAspect="1"/>
-          </p:cNvPicPr>
-          <p:nvPr/>
-        </p:nvPicPr>
-        <p:blipFill>
-          <a:blip r:embed="rId3"/>
-          <a:stretch>
-            <a:fillRect/>
-          </a:stretch>
-        </p:blipFill>
-        <p:spPr>
-          <a:xfrm>
-            <a:off x="8621075" y="2293643"/>
-            <a:ext cx="2844368" cy="1777730"/>
-          </a:xfrm>
-          <a:prstGeom prst="rect">
-            <a:avLst/>
-          </a:prstGeom>
-        </p:spPr>
-      </p:pic>
-      <p:sp>
-        <p:nvSpPr>
-          <p:cNvPr id="23" name="TextBox 22"/>
-          <p:cNvSpPr txBox="1"/>
-          <p:nvPr/>
-        </p:nvSpPr>
-        <p:spPr>
-          <a:xfrm>
-            <a:off x="8199201" y="4117093"/>
-            <a:ext cx="3688116" cy="198122"/>
-          </a:xfrm>
-          <a:prstGeom prst="rect">
-            <a:avLst/>
-          </a:prstGeom>
-          <a:noFill/>
-        </p:spPr>
-        <p:txBody>
-          <a:bodyPr wrap="square" anchor="t" lIns="0" rIns="0" tIns="0" bIns="0">
-            <a:spAutoFit/>
-          </a:bodyPr>
-          <a:lstStyle/>
-          <a:p>
-            <a:r>
-              <a:rPr sz="780">
-                <a:solidFill>
-                  <a:srgbClr val="475159"/>
-                </a:solidFill>
-                <a:latin typeface="Geist"/>
-              </a:rPr>
-              <a:t>Author+ YY Journal</a:t>
-            </a:r>
-          </a:p>
-        </p:txBody>
-      </p:sp>
-      <p:pic>
-        <p:nvPicPr>
-          <p:cNvPr id="24" name="Picture 23" descr="image.png"/>
-          <p:cNvPicPr>
-            <a:picLocks noChangeAspect="1"/>
-          </p:cNvPicPr>
-          <p:nvPr/>
-        </p:nvPicPr>
-        <p:blipFill>
-          <a:blip r:embed="rId3"/>
-          <a:stretch>
-            <a:fillRect/>
-          </a:stretch>
-        </p:blipFill>
-        <p:spPr>
-          <a:xfrm>
-            <a:off x="8621075" y="4309119"/>
-            <a:ext cx="2844368" cy="1777730"/>
-          </a:xfrm>
-          <a:prstGeom prst="rect">
-            <a:avLst/>
-          </a:prstGeom>
-        </p:spPr>
-      </p:pic>
-      <p:sp>
-        <p:nvSpPr>
-          <p:cNvPr id="25" name="TextBox 24"/>
-          <p:cNvSpPr txBox="1"/>
-          <p:nvPr/>
-        </p:nvSpPr>
-        <p:spPr>
-          <a:xfrm>
-            <a:off x="8199201" y="6132569"/>
-            <a:ext cx="3688116" cy="198122"/>
-          </a:xfrm>
-          <a:prstGeom prst="rect">
-            <a:avLst/>
-          </a:prstGeom>
-          <a:noFill/>
-        </p:spPr>
-        <p:txBody>
-          <a:bodyPr wrap="square" anchor="t" lIns="0" rIns="0" tIns="0" bIns="0">
-            <a:spAutoFit/>
-          </a:bodyPr>
-          <a:lstStyle/>
-          <a:p>
-            <a:r>
-              <a:rPr sz="780">
-                <a:solidFill>
-                  <a:srgbClr val="475159"/>
-                </a:solidFill>
-                <a:latin typeface="Geist"/>
-              </a:rPr>
-              <a:t>Author+ YY Journal</a:t>
+              <a:t>Sixth+ YY Journal</a:t>
             </a:r>
           </a:p>
         </p:txBody>
@@ -5057,8 +5305,8 @@
         </p:nvSpPr>
         <p:spPr>
           <a:xfrm>
-            <a:off x="304803" y="6516621"/>
-            <a:ext cx="11582514" cy="158498"/>
+            <a:off x="304803" y="6544358"/>
+            <a:ext cx="11582514" cy="130760"/>
           </a:xfrm>
           <a:prstGeom prst="rect">
             <a:avLst/>
@@ -5066,11 +5314,19 @@
           <a:noFill/>
         </p:spPr>
         <p:txBody>
-          <a:bodyPr wrap="square" anchor="b" lIns="0" rIns="0" tIns="0" bIns="0">
+          <a:bodyPr wrap="square" lIns="0" rIns="0" tIns="0" bIns="0">
             <a:spAutoFit/>
           </a:bodyPr>
           <a:lstStyle/>
           <a:p>
+            <a:pPr>
+              <a:lnSpc>
+                <a:spcPts val="1030"/>
+              </a:lnSpc>
+              <a:spcBef>
+                <a:spcPts val="0"/>
+              </a:spcBef>
+            </a:pPr>
             <a:r>
               <a:rPr sz="900">
                 <a:solidFill>
